--- a/media/resources/files/Onduktar_Akcha_Aky_Toloo_Chynzhyr_SmossHm.pptx
+++ b/media/resources/files/Onduktar_Akcha_Aky_Toloo_Chynzhyr_SmossHm.pptx
@@ -24738,7 +24738,7 @@
             </a:pPr>
             <a:r>
               <a:rPr lang="ru-RU" sz="3200" dirty="0"/>
-              <a:t>Турдуу пикирлер учун ыраазычылык билдиребиз.</a:t>
+              <a:t>Түрдүү пикирлер үчүн ыраазычылык билдиребиз.</a:t>
             </a:r>
           </a:p>
           <a:p>

--- a/media/resources/files/Onduktar_Akcha_Aky_Toloo_Chynzhyr_SmossHm.pptx
+++ b/media/resources/files/Onduktar_Akcha_Aky_Toloo_Chynzhyr_SmossHm.pptx
@@ -3689,7 +3689,7 @@
           <a:p>
             <a:r>
               <a:rPr lang="ru-RU" sz="2400" dirty="0"/>
-              <a:t>Бул ресурс математикалык ыкманын жандуу демонстрацияларын камсыз кылат.</a:t>
+              <a:t>Бул ресурс ыкманы жандуу көрсөтөт.</a:t>
             </a:r>
           </a:p>
           <a:p>
@@ -4191,7 +4191,7 @@
                             <a:sysClr val="windowText" lastClr="000000"/>
                           </a:solidFill>
                         </a:rPr>
-                        <a:t>5 саатка саатына 8.50</a:t>
+                        <a:t>5 саатка саатына 8,50</a:t>
                       </a:r>
                       <a:r>
                         <a:rPr lang="en-US" sz="1400" b="0" dirty="0">
@@ -4631,7 +4631,7 @@
                           <a:ea typeface="+mn-ea"/>
                           <a:cs typeface="+mn-cs"/>
                         </a:rPr>
-                        <a:t>446.25</a:t>
+                        <a:t>446,25</a:t>
                       </a:r>
                     </a:p>
                   </a:txBody>
@@ -5275,7 +5275,7 @@
                           <a:ea typeface="+mn-ea"/>
                           <a:cs typeface="+mn-cs"/>
                         </a:rPr>
-                        <a:t>1359.38</a:t>
+                        <a:t>1359,38</a:t>
                       </a:r>
                     </a:p>
                   </a:txBody>
@@ -5959,7 +5959,7 @@
                           <a:ea typeface="+mn-ea"/>
                           <a:cs typeface="+mn-cs"/>
                         </a:rPr>
-                        <a:t>42.50</a:t>
+                        <a:t>42,50</a:t>
                       </a:r>
                     </a:p>
                   </a:txBody>
@@ -6281,7 +6281,7 @@
                           <a:ea typeface="+mn-ea"/>
                           <a:cs typeface="+mn-cs"/>
                         </a:rPr>
-                        <a:t>7.50 </a:t>
+                        <a:t>7,50 </a:t>
                       </a:r>
                     </a:p>
                   </a:txBody>
@@ -6619,7 +6619,7 @@
                           <a:ea typeface="+mn-ea"/>
                           <a:cs typeface="+mn-cs"/>
                         </a:rPr>
-                        <a:t>913.68</a:t>
+                        <a:t>913,68</a:t>
                       </a:r>
                     </a:p>
                   </a:txBody>
@@ -6837,7 +6837,7 @@
                             <a:sysClr val="windowText" lastClr="000000"/>
                           </a:solidFill>
                         </a:rPr>
-                        <a:t>күнүнө 8 жарым саат менен беш күндүк жумасына 318.75</a:t>
+                        <a:t>күнүнө 8 жарым саат менен беш күндүк жумасына 318,75</a:t>
                       </a:r>
                       <a:r>
                         <a:rPr lang="en-US" sz="1400" b="0" dirty="0">
@@ -7255,7 +7255,7 @@
                           <a:ea typeface="+mn-ea"/>
                           <a:cs typeface="+mn-cs"/>
                         </a:rPr>
-                        <a:t>6.5</a:t>
+                        <a:t>6,5</a:t>
                       </a:r>
                       <a:endParaRPr kumimoji="0" lang="en-GB" sz="1400" b="1" i="0" u="none" strike="noStrike" kern="1200" cap="none" spc="0" normalizeH="0" baseline="0" noProof="0" dirty="0">
                         <a:ln>
@@ -8063,7 +8063,7 @@
                             <a:sysClr val="windowText" lastClr="000000"/>
                           </a:solidFill>
                         </a:rPr>
-                        <a:t>5 саатка саатына 8.50</a:t>
+                        <a:t>5 саатка саатына 8,50</a:t>
                       </a:r>
                       <a:r>
                         <a:rPr lang="en-US" sz="1400" b="0" dirty="0">
@@ -8529,7 +8529,7 @@
                           <a:ea typeface="+mn-ea"/>
                           <a:cs typeface="+mn-cs"/>
                         </a:rPr>
-                        <a:t>446.25</a:t>
+                        <a:t>446,25</a:t>
                       </a:r>
                     </a:p>
                   </a:txBody>
@@ -9189,7 +9189,7 @@
                           <a:ea typeface="+mn-ea"/>
                           <a:cs typeface="+mn-cs"/>
                         </a:rPr>
-                        <a:t>1359.38</a:t>
+                        <a:t>1359,38</a:t>
                       </a:r>
                     </a:p>
                   </a:txBody>
@@ -10309,7 +10309,7 @@
                           <a:ea typeface="+mn-ea"/>
                           <a:cs typeface="+mn-cs"/>
                         </a:rPr>
-                        <a:t>7.50 </a:t>
+                        <a:t>7,50 </a:t>
                       </a:r>
                     </a:p>
                   </a:txBody>
@@ -10647,7 +10647,7 @@
                           <a:ea typeface="+mn-ea"/>
                           <a:cs typeface="+mn-cs"/>
                         </a:rPr>
-                        <a:t>913.68</a:t>
+                        <a:t>913,68</a:t>
                       </a:r>
                     </a:p>
                   </a:txBody>
@@ -10865,7 +10865,7 @@
                             <a:sysClr val="windowText" lastClr="000000"/>
                           </a:solidFill>
                         </a:rPr>
-                        <a:t>күнүнө 8 жарым саат менен беш күндүк жумасына 318.75</a:t>
+                        <a:t>күнүнө 8 жарым саат менен беш күндүк жумасына 318,75</a:t>
                       </a:r>
                       <a:r>
                         <a:rPr lang="en-US" sz="1400" b="0" dirty="0">
@@ -11340,7 +11340,7 @@
                           <a:ea typeface="+mn-ea"/>
                           <a:cs typeface="+mn-cs"/>
                         </a:rPr>
-                        <a:t>6.5</a:t>
+                        <a:t>6,5</a:t>
                       </a:r>
                       <a:endParaRPr kumimoji="0" lang="en-GB" sz="1400" b="1" i="0" u="none" strike="noStrike" kern="1200" cap="none" spc="0" normalizeH="0" baseline="0" noProof="0" dirty="0">
                         <a:ln>
@@ -12348,7 +12348,7 @@
                             <a:sysClr val="windowText" lastClr="000000"/>
                           </a:solidFill>
                         </a:rPr>
-                        <a:t>5 саатка саатына 8.50</a:t>
+                        <a:t>5 саатка саатына 8,50</a:t>
                       </a:r>
                       <a:r>
                         <a:rPr lang="en-US" sz="1400" b="0" dirty="0">
@@ -14765,7 +14765,7 @@
                           <a:ea typeface="+mn-ea"/>
                           <a:cs typeface="+mn-cs"/>
                         </a:rPr>
-                        <a:t> £7.50</a:t>
+                        <a:t> £7,50</a:t>
                       </a:r>
                       <a:endParaRPr kumimoji="0" lang="en-GB" sz="1400" b="0" i="0" u="none" strike="noStrike" kern="1200" cap="none" spc="0" normalizeH="0" baseline="0" noProof="0" dirty="0">
                         <a:ln>
@@ -15384,7 +15384,7 @@
                             <a:sysClr val="windowText" lastClr="000000"/>
                           </a:solidFill>
                         </a:rPr>
-                        <a:t>күнүнө 8 жарым саат менен беш күндүк жумасына 318.75</a:t>
+                        <a:t>күнүнө 8 жарым саат менен беш күндүк жумасына 318,75</a:t>
                       </a:r>
                       <a:r>
                         <a:rPr lang="en-US" sz="1400" b="0" dirty="0">
@@ -16874,7 +16874,7 @@
                             <a:sysClr val="windowText" lastClr="000000"/>
                           </a:solidFill>
                         </a:rPr>
-                        <a:t>5 саатка саатына 8.50</a:t>
+                        <a:t>5 саатка саатына 8,50</a:t>
                       </a:r>
                       <a:r>
                         <a:rPr lang="en-US" sz="1400" b="0" dirty="0">
@@ -17314,7 +17314,7 @@
                           <a:ea typeface="+mn-ea"/>
                           <a:cs typeface="+mn-cs"/>
                         </a:rPr>
-                        <a:t>446.25</a:t>
+                        <a:t>446,25</a:t>
                       </a:r>
                     </a:p>
                   </a:txBody>
@@ -17958,7 +17958,7 @@
                           <a:ea typeface="+mn-ea"/>
                           <a:cs typeface="+mn-cs"/>
                         </a:rPr>
-                        <a:t>1359.38</a:t>
+                        <a:t>1359,38</a:t>
                       </a:r>
                     </a:p>
                   </a:txBody>
@@ -18642,7 +18642,7 @@
                           <a:ea typeface="+mn-ea"/>
                           <a:cs typeface="+mn-cs"/>
                         </a:rPr>
-                        <a:t>42.50</a:t>
+                        <a:t>42,50</a:t>
                       </a:r>
                     </a:p>
                   </a:txBody>
@@ -18964,7 +18964,7 @@
                           <a:ea typeface="+mn-ea"/>
                           <a:cs typeface="+mn-cs"/>
                         </a:rPr>
-                        <a:t>7.50 </a:t>
+                        <a:t>7,50 </a:t>
                       </a:r>
                     </a:p>
                   </a:txBody>
@@ -19302,7 +19302,7 @@
                           <a:ea typeface="+mn-ea"/>
                           <a:cs typeface="+mn-cs"/>
                         </a:rPr>
-                        <a:t>913.68</a:t>
+                        <a:t>913,68</a:t>
                       </a:r>
                     </a:p>
                   </a:txBody>
@@ -19520,7 +19520,7 @@
                             <a:sysClr val="windowText" lastClr="000000"/>
                           </a:solidFill>
                         </a:rPr>
-                        <a:t>күнүнө 8 жарым саат менен беш күндүк жумасына 318.75</a:t>
+                        <a:t>күнүнө 8 жарым саат менен беш күндүк жумасына 318,75</a:t>
                       </a:r>
                       <a:r>
                         <a:rPr lang="en-US" sz="1400" b="0" dirty="0">
@@ -19938,7 +19938,7 @@
                           <a:ea typeface="+mn-ea"/>
                           <a:cs typeface="+mn-cs"/>
                         </a:rPr>
-                        <a:t>6.5</a:t>
+                        <a:t>6,5</a:t>
                       </a:r>
                       <a:endParaRPr kumimoji="0" lang="en-GB" sz="1400" b="1" i="0" u="none" strike="noStrike" kern="1200" cap="none" spc="0" normalizeH="0" baseline="0" noProof="0" dirty="0">
                         <a:ln>
@@ -20716,7 +20716,7 @@
                             <a:sysClr val="windowText" lastClr="000000"/>
                           </a:solidFill>
                         </a:rPr>
-                        <a:t>5 саатка саатына 8.50</a:t>
+                        <a:t>5 саатка саатына 8,50</a:t>
                       </a:r>
                       <a:r>
                         <a:rPr lang="en-US" sz="1400" b="0" dirty="0">
@@ -21156,7 +21156,7 @@
                           <a:ea typeface="+mn-ea"/>
                           <a:cs typeface="+mn-cs"/>
                         </a:rPr>
-                        <a:t>446.25</a:t>
+                        <a:t>446,25</a:t>
                       </a:r>
                     </a:p>
                   </a:txBody>
@@ -21800,7 +21800,7 @@
                           <a:ea typeface="+mn-ea"/>
                           <a:cs typeface="+mn-cs"/>
                         </a:rPr>
-                        <a:t>1359.38</a:t>
+                        <a:t>1359,38</a:t>
                       </a:r>
                     </a:p>
                   </a:txBody>
@@ -22484,7 +22484,7 @@
                           <a:ea typeface="+mn-ea"/>
                           <a:cs typeface="+mn-cs"/>
                         </a:rPr>
-                        <a:t>42.50</a:t>
+                        <a:t>42,50</a:t>
                       </a:r>
                     </a:p>
                   </a:txBody>
@@ -22806,7 +22806,7 @@
                           <a:ea typeface="+mn-ea"/>
                           <a:cs typeface="+mn-cs"/>
                         </a:rPr>
-                        <a:t>7.50 </a:t>
+                        <a:t>7,50 </a:t>
                       </a:r>
                     </a:p>
                   </a:txBody>
@@ -23144,7 +23144,7 @@
                           <a:ea typeface="+mn-ea"/>
                           <a:cs typeface="+mn-cs"/>
                         </a:rPr>
-                        <a:t>913.68</a:t>
+                        <a:t>913,68</a:t>
                       </a:r>
                     </a:p>
                   </a:txBody>
@@ -23362,7 +23362,7 @@
                             <a:sysClr val="windowText" lastClr="000000"/>
                           </a:solidFill>
                         </a:rPr>
-                        <a:t>күнүнө 8 жарым саат менен беш күндүк жумасына 318.75</a:t>
+                        <a:t>күнүнө 8 жарым саат менен беш күндүк жумасына 318,75</a:t>
                       </a:r>
                       <a:r>
                         <a:rPr lang="en-US" sz="1400" b="0" dirty="0">
@@ -23780,7 +23780,7 @@
                           <a:ea typeface="+mn-ea"/>
                           <a:cs typeface="+mn-cs"/>
                         </a:rPr>
-                        <a:t>6.5</a:t>
+                        <a:t>6,5</a:t>
                       </a:r>
                       <a:endParaRPr kumimoji="0" lang="en-GB" sz="1400" b="1" i="0" u="none" strike="noStrike" kern="1200" cap="none" spc="0" normalizeH="0" baseline="0" noProof="0" dirty="0">
                         <a:ln>
